--- a/carpentry/intake-142/PowerPoint/Day-18_2026-11-30_Week-6.pptx
+++ b/carpentry/intake-142/PowerPoint/Day-18_2026-11-30_Week-6.pptx
@@ -1192,7 +1192,7 @@
           <a:p/>
           <a:p>
             <a:r>
-              <a:t>Figure 10.3 on page 156 shows a rectangle cut along its diagonal. The two resulting triangles together cover the original rectangle, so each covers half its area. Now follow the other triangles: the height can lie inside or outside the triangle, but it always meets the base at a right angle. Why can differently leaning triangles have the same area? They share the same base and perpendicular height. Do not substitute the sloping side just because it is a visible edge. The perpendicular distance is what controls how much area lies above the base.</a:t>
+              <a:t>Figure 10.3 on page 244 shows a rectangle cut along its diagonal. The two resulting triangles together cover the original rectangle, so each covers half its area. Now follow the other triangles: the height can lie inside or outside the triangle, but it always meets the base at a right angle. Why can differently leaning triangles have the same area? They share the same base and perpendicular height. Do not substitute the sloping side just because it is a visible edge. The perpendicular distance is what controls how much area lies above the base.</a:t>
             </a:r>
           </a:p>
         </p:txBody>
@@ -1268,7 +1268,7 @@
           <a:p/>
           <a:p>
             <a:r>
-              <a:t>Example 10.1 on page 155 uses a base plate 600 millimetres by 450 millimetres. Multiply to get 270,000 square millimetres. Converting to square metres means dividing by one million, giving 0.27 square metres. Check another way: convert the sides first to 0.6 metre and 0.45 metre, then multiply them. The answer is again 0.27 square metres. Which method is more comfortable for you? Both are valid, and comparing them is a strong check. Dividing the area by only 1,000 would produce 270 square metres, far too large for this plate.</a:t>
+              <a:t>Example 10.1 on page 243 uses a base plate 600 millimetres by 450 millimetres. Multiply to get 270,000 square millimetres. Converting to square metres means dividing by one million, giving 0.27 square metres. Check another way: convert the sides first to 0.6 metre and 0.45 metre, then multiply them. The answer is again 0.27 square metres. Which method is more comfortable for you? Both are valid, and comparing them is a strong check. Dividing the area by only 1,000 would produce 270 square metres, far too large for this plate.</a:t>
             </a:r>
           </a:p>
         </p:txBody>
@@ -5362,7 +5362,7 @@
                 </a:solidFill>
                 <a:latin typeface="Arial"/>
               </a:rPr>
-              <a:t>Textbook sections 10.1–10.3 pp.154–157; sections 7.4 pp.113–115</a:t>
+              <a:t>Textbook sections 10.1–10.3 pp.242–245; sections 7.4 pp.170–172</a:t>
             </a:r>
           </a:p>
         </p:txBody>
@@ -6120,7 +6120,7 @@
                 </a:solidFill>
                 <a:latin typeface="Arial"/>
               </a:rPr>
-              <a:t>Textbook sections 10.1–10.3 pp.154–157; sections 7.4 pp.113–115</a:t>
+              <a:t>Textbook sections 10.1–10.3 pp.242–245; sections 7.4 pp.170–172</a:t>
             </a:r>
           </a:p>
         </p:txBody>
@@ -6320,7 +6320,7 @@
                 </a:solidFill>
                 <a:latin typeface="Arial"/>
               </a:rPr>
-              <a:t>Resources: Exercise Book 10A Q1–8 (p.63); 10B Q1,4 (p.65)</a:t>
+              <a:t>Resources: Exercise Book 10A Q1–8 (p.93); 10B Q1,4 (p.95)</a:t>
             </a:r>
           </a:p>
         </p:txBody>
@@ -6934,7 +6934,7 @@
                 </a:solidFill>
                 <a:latin typeface="Arial"/>
               </a:rPr>
-              <a:t>Textbook sections 10.1–10.3 pp.154–157; sections 7.4 pp.113–115</a:t>
+              <a:t>Textbook sections 10.1–10.3 pp.242–245; sections 7.4 pp.170–172</a:t>
             </a:r>
           </a:p>
         </p:txBody>
@@ -7665,7 +7665,7 @@
                 </a:solidFill>
                 <a:latin typeface="Arial"/>
               </a:rPr>
-              <a:t>Textbook sections 10.1–10.3 pp.154–157; sections 7.4 pp.113–115</a:t>
+              <a:t>Textbook sections 10.1–10.3 pp.242–245; sections 7.4 pp.170–172</a:t>
             </a:r>
           </a:p>
         </p:txBody>
@@ -8399,7 +8399,7 @@
                 </a:solidFill>
                 <a:latin typeface="Arial"/>
               </a:rPr>
-              <a:t>Textbook sections 10.1–10.3 pp.154–157; sections 7.4 pp.113–115</a:t>
+              <a:t>Textbook sections 10.1–10.3 pp.242–245; sections 7.4 pp.170–172</a:t>
             </a:r>
           </a:p>
         </p:txBody>
@@ -8599,7 +8599,7 @@
                 </a:solidFill>
                 <a:latin typeface="Arial"/>
               </a:rPr>
-              <a:t>Resources: Exercise Book 10A Q1–8 (p.63); 10B Q1,4 (p.65)</a:t>
+              <a:t>Resources: Exercise Book 10A Q1–8 (p.93); 10B Q1,4 (p.95)</a:t>
             </a:r>
           </a:p>
         </p:txBody>
@@ -9213,7 +9213,7 @@
                 </a:solidFill>
                 <a:latin typeface="Arial"/>
               </a:rPr>
-              <a:t>Textbook sections 10.1–10.3 pp.154–157; sections 7.4 pp.113–115</a:t>
+              <a:t>Textbook sections 10.1–10.3 pp.242–245; sections 7.4 pp.170–172</a:t>
             </a:r>
           </a:p>
         </p:txBody>
@@ -9989,7 +9989,7 @@
                 </a:solidFill>
                 <a:latin typeface="Arial"/>
               </a:rPr>
-              <a:t>Textbook sections 10.1–10.3 pp.154–157; sections 7.4 pp.113–115</a:t>
+              <a:t>Textbook sections 10.1–10.3 pp.242–245; sections 7.4 pp.170–172</a:t>
             </a:r>
           </a:p>
         </p:txBody>
@@ -10948,7 +10948,7 @@
                 </a:solidFill>
                 <a:latin typeface="Arial"/>
               </a:rPr>
-              <a:t>Textbook sections 10.1–10.3 pp.154–157; sections 7.4 pp.113–115</a:t>
+              <a:t>Textbook sections 10.1–10.3 pp.242–245; sections 7.4 pp.170–172</a:t>
             </a:r>
           </a:p>
         </p:txBody>
@@ -11659,7 +11659,7 @@
                 </a:solidFill>
                 <a:latin typeface="Arial"/>
               </a:rPr>
-              <a:t>Textbook sections 10.1–10.3 pp.154–157; sections 7.4 pp.113–115</a:t>
+              <a:t>Textbook sections 10.1–10.3 pp.242–245; sections 7.4 pp.170–172</a:t>
             </a:r>
           </a:p>
         </p:txBody>
@@ -12370,7 +12370,7 @@
                 </a:solidFill>
                 <a:latin typeface="Arial"/>
               </a:rPr>
-              <a:t>Textbook sections 10.1–10.3 pp.154–157; sections 7.4 pp.113–115</a:t>
+              <a:t>Textbook sections 10.1–10.3 pp.242–245; sections 7.4 pp.170–172</a:t>
             </a:r>
           </a:p>
         </p:txBody>
@@ -12570,7 +12570,7 @@
                 </a:solidFill>
                 <a:latin typeface="Arial"/>
               </a:rPr>
-              <a:t>Resources: Exercise Book 10A Q1–8 (p.63); 10B Q1,4 (p.65)</a:t>
+              <a:t>Resources: Exercise Book 10A Q1–8 (p.93); 10B Q1,4 (p.95)</a:t>
             </a:r>
           </a:p>
         </p:txBody>
@@ -16536,7 +16536,7 @@
                 </a:solidFill>
                 <a:latin typeface="Arial"/>
               </a:rPr>
-              <a:t>Textbook sections 10.1–10.3 pp.154–157; sections 7.4 pp.113–115</a:t>
+              <a:t>Textbook sections 10.1–10.3 pp.242–245; sections 7.4 pp.170–172</a:t>
             </a:r>
           </a:p>
         </p:txBody>
@@ -17247,7 +17247,7 @@
                 </a:solidFill>
                 <a:latin typeface="Arial"/>
               </a:rPr>
-              <a:t>Textbook sections 10.1–10.3 pp.154–157; sections 7.4 pp.113–115</a:t>
+              <a:t>Textbook sections 10.1–10.3 pp.242–245; sections 7.4 pp.170–172</a:t>
             </a:r>
           </a:p>
         </p:txBody>
@@ -17447,7 +17447,7 @@
                 </a:solidFill>
                 <a:latin typeface="Arial"/>
               </a:rPr>
-              <a:t>Resources: Exercise Book 10A Q1–8 (p.63); 10B Q1,4 (p.65)</a:t>
+              <a:t>Resources: Exercise Book 10A Q1–8 (p.93); 10B Q1,4 (p.95)</a:t>
             </a:r>
           </a:p>
         </p:txBody>
@@ -18726,7 +18726,7 @@
                 </a:solidFill>
                 <a:latin typeface="Arial"/>
               </a:rPr>
-              <a:t>Textbook sections 10.4–10.7 pp.158–164</a:t>
+              <a:t>Textbook sections 10.4–10.7 pp.246–254</a:t>
             </a:r>
           </a:p>
         </p:txBody>
@@ -18926,7 +18926,7 @@
                 </a:solidFill>
                 <a:latin typeface="Arial"/>
               </a:rPr>
-              <a:t>Textbook sections 10.4–10.7 pp.158–164</a:t>
+              <a:t>Textbook sections 10.4–10.7 pp.246–254</a:t>
             </a:r>
           </a:p>
         </p:txBody>
@@ -18974,7 +18974,7 @@
                 </a:solidFill>
                 <a:latin typeface="Arial"/>
               </a:rPr>
-              <a:t>Exercise Book 10A Q10–12 (p.64); 10B Q2 (p.65), Q11–12 (p.66); 10C Q4 (p.67)</a:t>
+              <a:t>Exercise Book 10A Q10–12 (p.94); 10B Q2 (p.95), Q11–12 (p.96); 10C Q4 (p.97)</a:t>
             </a:r>
           </a:p>
         </p:txBody>
@@ -19636,7 +19636,7 @@
                 </a:solidFill>
                 <a:latin typeface="Arial"/>
               </a:rPr>
-              <a:t>Textbook sections 10.4–10.7 pp.158–164</a:t>
+              <a:t>Textbook sections 10.4–10.7 pp.246–254</a:t>
             </a:r>
           </a:p>
         </p:txBody>
@@ -19836,7 +19836,7 @@
                 </a:solidFill>
                 <a:latin typeface="Arial"/>
               </a:rPr>
-              <a:t>Resources: Exercise Book 10A Q10–12 (p.64); 10B Q2 (p.65), Q11–12 (p.66); 10C Q4 (p.67)</a:t>
+              <a:t>Resources: Exercise Book 10A Q10–12 (p.94); 10B Q2 (p.95), Q11–12 (p.96); 10C Q4 (p.97)</a:t>
             </a:r>
           </a:p>
         </p:txBody>
@@ -20585,7 +20585,7 @@
                 </a:solidFill>
                 <a:latin typeface="Arial"/>
               </a:rPr>
-              <a:t>Textbook sections 10.4–10.7 pp.158–164</a:t>
+              <a:t>Textbook sections 10.4–10.7 pp.246–254</a:t>
             </a:r>
           </a:p>
         </p:txBody>
@@ -21830,7 +21830,7 @@
                 </a:solidFill>
                 <a:latin typeface="Arial"/>
               </a:rPr>
-              <a:t>Textbook sections 10.4–10.7 pp.158–164</a:t>
+              <a:t>Textbook sections 10.4–10.7 pp.246–254</a:t>
             </a:r>
           </a:p>
         </p:txBody>
@@ -23256,7 +23256,7 @@
                 <a:ea typeface="Arial" pitchFamily="34" charset="-122"/>
                 <a:cs typeface="Arial" pitchFamily="34" charset="-120"/>
               </a:rPr>
-              <a:t>Exercise Book 10B Q11 p.66 • Schematic, not to scale • Surface-net preview is optional after core work</a:t>
+              <a:t>Exercise Book 10B Q11 p.96 • Schematic, not to scale • Surface-net preview is optional after core work</a:t>
             </a:r>
             <a:endParaRPr lang="en-US" sz="1050" dirty="0"/>
           </a:p>
@@ -23828,7 +23828,7 @@
                 </a:solidFill>
                 <a:latin typeface="Arial"/>
               </a:rPr>
-              <a:t>Textbook  |  page 162</a:t>
+              <a:t>Textbook  |  page 251</a:t>
             </a:r>
           </a:p>
         </p:txBody>
@@ -23876,7 +23876,7 @@
                 </a:solidFill>
                 <a:latin typeface="Arial"/>
               </a:rPr>
-              <a:t>Textbook sections 10.4–10.7 pp.158–164</a:t>
+              <a:t>Textbook sections 10.4–10.7 pp.246–254</a:t>
             </a:r>
           </a:p>
         </p:txBody>
@@ -23948,7 +23948,7 @@
                 </a:solidFill>
                 <a:latin typeface="Arial"/>
               </a:rPr>
-              <a:t>Textbook p.162 • Example 10.7 — Split an L-shaped plate into non-overlapping rectangles</a:t>
+              <a:t>Textbook p.251 • Example 10.7 — Split an L-shaped plate into non-overlapping rectangles</a:t>
             </a:r>
           </a:p>
         </p:txBody>
@@ -24514,7 +24514,7 @@
                 </a:solidFill>
                 <a:latin typeface="Arial"/>
               </a:rPr>
-              <a:t>Textbook  |  page 162</a:t>
+              <a:t>Textbook  |  page 252</a:t>
             </a:r>
           </a:p>
         </p:txBody>
@@ -24562,7 +24562,7 @@
                 </a:solidFill>
                 <a:latin typeface="Arial"/>
               </a:rPr>
-              <a:t>Textbook sections 10.4–10.7 pp.158–164</a:t>
+              <a:t>Textbook sections 10.4–10.7 pp.246–254</a:t>
             </a:r>
           </a:p>
         </p:txBody>
@@ -24634,7 +24634,7 @@
                 </a:solidFill>
                 <a:latin typeface="Arial"/>
               </a:rPr>
-              <a:t>Textbook p.162 • Example 10.8 — Add the shapes and subtract the opening</a:t>
+              <a:t>Textbook p.252 • Example 10.8 — Add the shapes and subtract the opening</a:t>
             </a:r>
           </a:p>
         </p:txBody>
@@ -25203,7 +25203,7 @@
                 </a:solidFill>
                 <a:latin typeface="Arial"/>
               </a:rPr>
-              <a:t>Textbook sections 10.1–10.3 pp.154–157; sections 7.4 pp.113–115</a:t>
+              <a:t>Textbook sections 10.1–10.3 pp.242–245; sections 7.4 pp.170–172</a:t>
             </a:r>
           </a:p>
         </p:txBody>
@@ -25403,7 +25403,7 @@
                 </a:solidFill>
                 <a:latin typeface="Arial"/>
               </a:rPr>
-              <a:t>Textbook sections 10.1–10.3 pp.154–157; sections 7.4 pp.113–115</a:t>
+              <a:t>Textbook sections 10.1–10.3 pp.242–245; sections 7.4 pp.170–172</a:t>
             </a:r>
           </a:p>
         </p:txBody>
@@ -25451,7 +25451,7 @@
                 </a:solidFill>
                 <a:latin typeface="Arial"/>
               </a:rPr>
-              <a:t>Exercise Book 10A Q1–8 (p.63); 10B Q1,4 (p.65)</a:t>
+              <a:t>Exercise Book 10A Q1–8 (p.93); 10B Q1,4 (p.95)</a:t>
             </a:r>
           </a:p>
         </p:txBody>
@@ -26113,7 +26113,7 @@
                 </a:solidFill>
                 <a:latin typeface="Arial"/>
               </a:rPr>
-              <a:t>Textbook sections 10.4–10.7 pp.158–164</a:t>
+              <a:t>Textbook sections 10.4–10.7 pp.246–254</a:t>
             </a:r>
           </a:p>
         </p:txBody>
@@ -26871,7 +26871,7 @@
                 </a:solidFill>
                 <a:latin typeface="Arial"/>
               </a:rPr>
-              <a:t>Textbook sections 10.4–10.7 pp.158–164</a:t>
+              <a:t>Textbook sections 10.4–10.7 pp.246–254</a:t>
             </a:r>
           </a:p>
         </p:txBody>
@@ -27071,7 +27071,7 @@
                 </a:solidFill>
                 <a:latin typeface="Arial"/>
               </a:rPr>
-              <a:t>Resources: Exercise Book 10A Q10–12 (p.64); 10B Q2 (p.65), Q11–12 (p.66); 10C Q4 (p.67)</a:t>
+              <a:t>Resources: Exercise Book 10A Q10–12 (p.94); 10B Q2 (p.95), Q11–12 (p.96); 10C Q4 (p.97)</a:t>
             </a:r>
           </a:p>
         </p:txBody>
@@ -27685,7 +27685,7 @@
                 </a:solidFill>
                 <a:latin typeface="Arial"/>
               </a:rPr>
-              <a:t>Textbook sections 10.4–10.7 pp.158–164</a:t>
+              <a:t>Textbook sections 10.4–10.7 pp.246–254</a:t>
             </a:r>
           </a:p>
         </p:txBody>
@@ -28441,7 +28441,7 @@
                 </a:solidFill>
                 <a:latin typeface="Arial"/>
               </a:rPr>
-              <a:t>Textbook sections 10.4–10.7 pp.158–164</a:t>
+              <a:t>Textbook sections 10.4–10.7 pp.246–254</a:t>
             </a:r>
           </a:p>
         </p:txBody>
@@ -29175,7 +29175,7 @@
                 </a:solidFill>
                 <a:latin typeface="Arial"/>
               </a:rPr>
-              <a:t>Textbook sections 10.4–10.7 pp.158–164</a:t>
+              <a:t>Textbook sections 10.4–10.7 pp.246–254</a:t>
             </a:r>
           </a:p>
         </p:txBody>
@@ -29375,7 +29375,7 @@
                 </a:solidFill>
                 <a:latin typeface="Arial"/>
               </a:rPr>
-              <a:t>Resources: Exercise Book 10A Q10–12 (p.64); 10B Q2 (p.65), Q11–12 (p.66); 10C Q4 (p.67)</a:t>
+              <a:t>Resources: Exercise Book 10A Q10–12 (p.94); 10B Q2 (p.95), Q11–12 (p.96); 10C Q4 (p.97)</a:t>
             </a:r>
           </a:p>
         </p:txBody>
@@ -29989,7 +29989,7 @@
                 </a:solidFill>
                 <a:latin typeface="Arial"/>
               </a:rPr>
-              <a:t>Textbook sections 10.4–10.7 pp.158–164</a:t>
+              <a:t>Textbook sections 10.4–10.7 pp.246–254</a:t>
             </a:r>
           </a:p>
         </p:txBody>
@@ -30765,7 +30765,7 @@
                 </a:solidFill>
                 <a:latin typeface="Arial"/>
               </a:rPr>
-              <a:t>Textbook sections 10.4–10.7 pp.158–164</a:t>
+              <a:t>Textbook sections 10.4–10.7 pp.246–254</a:t>
             </a:r>
           </a:p>
         </p:txBody>
@@ -31724,7 +31724,7 @@
                 </a:solidFill>
                 <a:latin typeface="Arial"/>
               </a:rPr>
-              <a:t>Textbook sections 10.4–10.7 pp.158–164</a:t>
+              <a:t>Textbook sections 10.4–10.7 pp.246–254</a:t>
             </a:r>
           </a:p>
         </p:txBody>
@@ -32435,7 +32435,7 @@
                 </a:solidFill>
                 <a:latin typeface="Arial"/>
               </a:rPr>
-              <a:t>Textbook sections 10.4–10.7 pp.158–164</a:t>
+              <a:t>Textbook sections 10.4–10.7 pp.246–254</a:t>
             </a:r>
           </a:p>
         </p:txBody>
@@ -33146,7 +33146,7 @@
                 </a:solidFill>
                 <a:latin typeface="Arial"/>
               </a:rPr>
-              <a:t>Textbook sections 10.4–10.7 pp.158–164</a:t>
+              <a:t>Textbook sections 10.4–10.7 pp.246–254</a:t>
             </a:r>
           </a:p>
         </p:txBody>
@@ -33346,7 +33346,7 @@
                 </a:solidFill>
                 <a:latin typeface="Arial"/>
               </a:rPr>
-              <a:t>Resources: Exercise Book 10A Q10–12 (p.64); 10B Q2 (p.65), Q11–12 (p.66); 10C Q4 (p.67)</a:t>
+              <a:t>Resources: Exercise Book 10A Q10–12 (p.94); 10B Q2 (p.95), Q11–12 (p.96); 10C Q4 (p.97)</a:t>
             </a:r>
           </a:p>
         </p:txBody>
@@ -33960,7 +33960,7 @@
                 </a:solidFill>
                 <a:latin typeface="Arial"/>
               </a:rPr>
-              <a:t>Textbook sections 10.1–10.3 pp.154–157; sections 7.4 pp.113–115</a:t>
+              <a:t>Textbook sections 10.1–10.3 pp.242–245; sections 7.4 pp.170–172</a:t>
             </a:r>
           </a:p>
         </p:txBody>
@@ -34160,7 +34160,7 @@
                 </a:solidFill>
                 <a:latin typeface="Arial"/>
               </a:rPr>
-              <a:t>Resources: Exercise Book 10A Q1–8 (p.63); 10B Q1,4 (p.65)</a:t>
+              <a:t>Resources: Exercise Book 10A Q1–8 (p.93); 10B Q1,4 (p.95)</a:t>
             </a:r>
           </a:p>
         </p:txBody>
@@ -34774,7 +34774,7 @@
                 </a:solidFill>
                 <a:latin typeface="Arial"/>
               </a:rPr>
-              <a:t>Textbook sections 10.4–10.7 pp.158–164</a:t>
+              <a:t>Textbook sections 10.4–10.7 pp.246–254</a:t>
             </a:r>
           </a:p>
         </p:txBody>
@@ -35485,7 +35485,7 @@
                 </a:solidFill>
                 <a:latin typeface="Arial"/>
               </a:rPr>
-              <a:t>Textbook sections 10.4–10.7 pp.158–164</a:t>
+              <a:t>Textbook sections 10.4–10.7 pp.246–254</a:t>
             </a:r>
           </a:p>
         </p:txBody>
@@ -36196,7 +36196,7 @@
                 </a:solidFill>
                 <a:latin typeface="Arial"/>
               </a:rPr>
-              <a:t>Textbook sections 10.4–10.7 pp.158–164</a:t>
+              <a:t>Textbook sections 10.4–10.7 pp.246–254</a:t>
             </a:r>
           </a:p>
         </p:txBody>
@@ -36396,7 +36396,7 @@
                 </a:solidFill>
                 <a:latin typeface="Arial"/>
               </a:rPr>
-              <a:t>Resources: Exercise Book 10A Q10–12 (p.64); 10B Q2 (p.65), Q11–12 (p.66); 10C Q4 (p.67)</a:t>
+              <a:t>Resources: Exercise Book 10A Q10–12 (p.94); 10B Q2 (p.95), Q11–12 (p.96); 10C Q4 (p.97)</a:t>
             </a:r>
           </a:p>
         </p:txBody>
@@ -37145,7 +37145,7 @@
                 </a:solidFill>
                 <a:latin typeface="Arial"/>
               </a:rPr>
-              <a:t>Textbook sections 10.1–10.3 pp.154–157; sections 7.4 pp.113–115</a:t>
+              <a:t>Textbook sections 10.1–10.3 pp.242–245; sections 7.4 pp.170–172</a:t>
             </a:r>
           </a:p>
         </p:txBody>
@@ -38390,7 +38390,7 @@
                 </a:solidFill>
                 <a:latin typeface="Arial"/>
               </a:rPr>
-              <a:t>Textbook sections 10.1–10.3 pp.154–157; sections 7.4 pp.113–115</a:t>
+              <a:t>Textbook sections 10.1–10.3 pp.242–245; sections 7.4 pp.170–172</a:t>
             </a:r>
           </a:p>
         </p:txBody>
@@ -39687,7 +39687,7 @@
                 <a:ea typeface="Arial" pitchFamily="34" charset="-122"/>
                 <a:cs typeface="Arial" pitchFamily="34" charset="-120"/>
               </a:rPr>
-              <a:t>Exercise Book 10B Q1 p.65 • Numeracy Hub → Volume and Layout → Area and perimeter</a:t>
+              <a:t>Exercise Book 10B Q1 p.95 • Numeracy Hub → Volume and Layout → Area and perimeter</a:t>
             </a:r>
             <a:endParaRPr lang="en-US" sz="1050" dirty="0"/>
           </a:p>
@@ -40283,7 +40283,7 @@
                 </a:solidFill>
                 <a:latin typeface="Arial"/>
               </a:rPr>
-              <a:t>Textbook  |  page 156</a:t>
+              <a:t>Textbook  |  page 244</a:t>
             </a:r>
           </a:p>
         </p:txBody>
@@ -40331,7 +40331,7 @@
                 </a:solidFill>
                 <a:latin typeface="Arial"/>
               </a:rPr>
-              <a:t>Textbook sections 10.1–10.3 pp.154–157; sections 7.4 pp.113–115</a:t>
+              <a:t>Textbook sections 10.1–10.3 pp.242–245; sections 7.4 pp.170–172</a:t>
             </a:r>
           </a:p>
         </p:txBody>
@@ -40403,7 +40403,7 @@
                 </a:solidFill>
                 <a:latin typeface="Arial"/>
               </a:rPr>
-              <a:t>Textbook p.156 • Figure 10.3 — Equal base and perpendicular height</a:t>
+              <a:t>Textbook p.244 • Figure 10.3 — Equal base and perpendicular height</a:t>
             </a:r>
           </a:p>
         </p:txBody>
@@ -40969,7 +40969,7 @@
                 </a:solidFill>
                 <a:latin typeface="Arial"/>
               </a:rPr>
-              <a:t>Textbook  |  page 155</a:t>
+              <a:t>Textbook  |  page 243</a:t>
             </a:r>
           </a:p>
         </p:txBody>
@@ -41017,7 +41017,7 @@
                 </a:solidFill>
                 <a:latin typeface="Arial"/>
               </a:rPr>
-              <a:t>Textbook sections 10.1–10.3 pp.154–157; sections 7.4 pp.113–115</a:t>
+              <a:t>Textbook sections 10.1–10.3 pp.242–245; sections 7.4 pp.170–172</a:t>
             </a:r>
           </a:p>
         </p:txBody>
@@ -41089,7 +41089,7 @@
                 </a:solidFill>
                 <a:latin typeface="Arial"/>
               </a:rPr>
-              <a:t>Textbook p.155 • Example 10.1 — Rectangle area and squared unit conversion</a:t>
+              <a:t>Textbook p.243 • Example 10.1 — Rectangle area and squared unit conversion</a:t>
             </a:r>
           </a:p>
         </p:txBody>

--- a/carpentry/intake-142/PowerPoint/Day-18_2026-11-30_Week-6.pptx
+++ b/carpentry/intake-142/PowerPoint/Day-18_2026-11-30_Week-6.pptx
@@ -17720,6 +17720,104 @@
           </a:p>
         </p:txBody>
       </p:sp>
+      <p:sp>
+        <p:nvSpPr>
+          <p:cNvPr id="22" name="Play quiz W06-L01"/>
+          <p:cNvSpPr txBox="1"/>
+          <p:nvPr/>
+        </p:nvSpPr>
+        <p:spPr>
+          <a:xfrm>
+            <a:off x="6355080" y="6606540"/>
+            <a:ext cx="822960" cy="210312"/>
+          </a:xfrm>
+          <a:prstGeom prst="rect">
+            <a:avLst/>
+          </a:prstGeom>
+          <a:noFill/>
+        </p:spPr>
+        <p:txBody>
+          <a:bodyPr wrap="square" lIns="0" rIns="0" tIns="0" bIns="0" anchor="t">
+            <a:normAutofit fontScale="100000" lnSpcReduction="0"/>
+          </a:bodyPr>
+          <a:lstStyle/>
+          <a:p>
+            <a:pPr>
+              <a:spcBef>
+                <a:spcPts val="0"/>
+              </a:spcBef>
+              <a:spcAft>
+                <a:spcPts val="0"/>
+              </a:spcAft>
+              <a:defRPr sz="1000" b="0">
+                <a:solidFill>
+                  <a:srgbClr val="D0002B"/>
+                </a:solidFill>
+                <a:latin typeface="Arial"/>
+              </a:defRPr>
+            </a:pPr>
+            <a:r>
+              <a:rPr sz="1000">
+                <a:solidFill>
+                  <a:srgbClr val="F7F8FC"/>
+                </a:solidFill>
+                <a:latin typeface="Arial"/>
+                <a:hlinkClick r:id="rId8"/>
+              </a:rPr>
+              <a:t>Play quiz</a:t>
+            </a:r>
+          </a:p>
+        </p:txBody>
+      </p:sp>
+      <p:sp>
+        <p:nvSpPr>
+          <p:cNvPr id="23" name="Quiz PDF W06-L01"/>
+          <p:cNvSpPr txBox="1"/>
+          <p:nvPr/>
+        </p:nvSpPr>
+        <p:spPr>
+          <a:xfrm>
+            <a:off x="7296912" y="6606540"/>
+            <a:ext cx="1005840" cy="210312"/>
+          </a:xfrm>
+          <a:prstGeom prst="rect">
+            <a:avLst/>
+          </a:prstGeom>
+          <a:noFill/>
+        </p:spPr>
+        <p:txBody>
+          <a:bodyPr wrap="square" lIns="0" rIns="0" tIns="0" bIns="0" anchor="t">
+            <a:normAutofit fontScale="100000" lnSpcReduction="0"/>
+          </a:bodyPr>
+          <a:lstStyle/>
+          <a:p>
+            <a:pPr>
+              <a:spcBef>
+                <a:spcPts val="0"/>
+              </a:spcBef>
+              <a:spcAft>
+                <a:spcPts val="0"/>
+              </a:spcAft>
+              <a:defRPr sz="1000" b="0">
+                <a:solidFill>
+                  <a:srgbClr val="D0002B"/>
+                </a:solidFill>
+                <a:latin typeface="Arial"/>
+              </a:defRPr>
+            </a:pPr>
+            <a:r>
+              <a:rPr sz="1000">
+                <a:solidFill>
+                  <a:srgbClr val="F7F8FC"/>
+                </a:solidFill>
+                <a:latin typeface="Arial"/>
+                <a:hlinkClick r:id="rId9"/>
+              </a:rPr>
+              <a:t>Quiz PDF</a:t>
+            </a:r>
+          </a:p>
+        </p:txBody>
+      </p:sp>
     </p:spTree>
   </p:cSld>
   <p:clrMapOvr>
@@ -36665,6 +36763,104 @@
                 <a:latin typeface="Arial"/>
               </a:rPr>
               <a:t>Day 18  •  2026-11-30  •  42</a:t>
+            </a:r>
+          </a:p>
+        </p:txBody>
+      </p:sp>
+      <p:sp>
+        <p:nvSpPr>
+          <p:cNvPr id="22" name="Play quiz W06-L02"/>
+          <p:cNvSpPr txBox="1"/>
+          <p:nvPr/>
+        </p:nvSpPr>
+        <p:spPr>
+          <a:xfrm>
+            <a:off x="6355080" y="6606540"/>
+            <a:ext cx="822960" cy="210312"/>
+          </a:xfrm>
+          <a:prstGeom prst="rect">
+            <a:avLst/>
+          </a:prstGeom>
+          <a:noFill/>
+        </p:spPr>
+        <p:txBody>
+          <a:bodyPr wrap="square" lIns="0" rIns="0" tIns="0" bIns="0" anchor="t">
+            <a:normAutofit fontScale="100000" lnSpcReduction="0"/>
+          </a:bodyPr>
+          <a:lstStyle/>
+          <a:p>
+            <a:pPr>
+              <a:spcBef>
+                <a:spcPts val="0"/>
+              </a:spcBef>
+              <a:spcAft>
+                <a:spcPts val="0"/>
+              </a:spcAft>
+              <a:defRPr sz="1000" b="0">
+                <a:solidFill>
+                  <a:srgbClr val="D0002B"/>
+                </a:solidFill>
+                <a:latin typeface="Arial"/>
+              </a:defRPr>
+            </a:pPr>
+            <a:r>
+              <a:rPr sz="1000">
+                <a:solidFill>
+                  <a:srgbClr val="F7F8FC"/>
+                </a:solidFill>
+                <a:latin typeface="Arial"/>
+                <a:hlinkClick r:id="rId8"/>
+              </a:rPr>
+              <a:t>Play quiz</a:t>
+            </a:r>
+          </a:p>
+        </p:txBody>
+      </p:sp>
+      <p:sp>
+        <p:nvSpPr>
+          <p:cNvPr id="23" name="Quiz PDF W06-L02"/>
+          <p:cNvSpPr txBox="1"/>
+          <p:nvPr/>
+        </p:nvSpPr>
+        <p:spPr>
+          <a:xfrm>
+            <a:off x="7296912" y="6606540"/>
+            <a:ext cx="1005840" cy="210312"/>
+          </a:xfrm>
+          <a:prstGeom prst="rect">
+            <a:avLst/>
+          </a:prstGeom>
+          <a:noFill/>
+        </p:spPr>
+        <p:txBody>
+          <a:bodyPr wrap="square" lIns="0" rIns="0" tIns="0" bIns="0" anchor="t">
+            <a:normAutofit fontScale="100000" lnSpcReduction="0"/>
+          </a:bodyPr>
+          <a:lstStyle/>
+          <a:p>
+            <a:pPr>
+              <a:spcBef>
+                <a:spcPts val="0"/>
+              </a:spcBef>
+              <a:spcAft>
+                <a:spcPts val="0"/>
+              </a:spcAft>
+              <a:defRPr sz="1000" b="0">
+                <a:solidFill>
+                  <a:srgbClr val="D0002B"/>
+                </a:solidFill>
+                <a:latin typeface="Arial"/>
+              </a:defRPr>
+            </a:pPr>
+            <a:r>
+              <a:rPr sz="1000">
+                <a:solidFill>
+                  <a:srgbClr val="F7F8FC"/>
+                </a:solidFill>
+                <a:latin typeface="Arial"/>
+                <a:hlinkClick r:id="rId9"/>
+              </a:rPr>
+              <a:t>Quiz PDF</a:t>
             </a:r>
           </a:p>
         </p:txBody>
